--- a/docs/diploma-defense.pptx
+++ b/docs/diploma-defense.pptx
@@ -3215,42 +3215,7 @@
         </p:nvSpPr>
         <p:spPr>
           <a:xfrm>
-            <a:off x="457200" y="2011680"/>
-            <a:ext cx="11430000" cy="1828800"/>
-          </a:xfrm>
-          <a:prstGeom prst="rect">
-            <a:avLst/>
-          </a:prstGeom>
-          <a:noFill/>
-        </p:spPr>
-        <p:txBody>
-          <a:bodyPr wrap="square" lIns="0" rIns="0" tIns="0" bIns="0">
-            <a:spAutoFit/>
-          </a:bodyPr>
-          <a:lstStyle/>
-          <a:p>
-            <a:pPr algn="ctr"/>
-            <a:r>
-              <a:rPr sz="3400" b="1">
-                <a:solidFill>
-                  <a:srgbClr val="000000"/>
-                </a:solidFill>
-                <a:latin typeface="Calibri"/>
-              </a:rPr>
-              <a:t>Автоматическая классификация фотографий</a:t>
-            </a:r>
-          </a:p>
-        </p:txBody>
-      </p:sp>
-      <p:sp>
-        <p:nvSpPr>
-          <p:cNvPr id="6" name="TextBox 5"/>
-          <p:cNvSpPr txBox="1"/>
-          <p:nvPr/>
-        </p:nvSpPr>
-        <p:spPr>
-          <a:xfrm>
-            <a:off x="457200" y="2606040"/>
+            <a:off x="457200" y="1920240"/>
             <a:ext cx="11430000" cy="640080"/>
           </a:xfrm>
           <a:prstGeom prst="rect">
@@ -3266,26 +3231,26 @@
           <a:p>
             <a:pPr algn="ctr"/>
             <a:r>
-              <a:rPr sz="3400" b="1">
+              <a:rPr sz="3000" b="1">
                 <a:solidFill>
                   <a:srgbClr val="000000"/>
                 </a:solidFill>
                 <a:latin typeface="Calibri"/>
               </a:rPr>
-              <a:t>по визуальному стилю</a:t>
-            </a:r>
-          </a:p>
-        </p:txBody>
-      </p:sp>
-      <p:sp>
-        <p:nvSpPr>
-          <p:cNvPr id="7" name="TextBox 6"/>
+              <a:t>Разработка системы автоматической</a:t>
+            </a:r>
+          </a:p>
+        </p:txBody>
+      </p:sp>
+      <p:sp>
+        <p:nvSpPr>
+          <p:cNvPr id="6" name="TextBox 5"/>
           <p:cNvSpPr txBox="1"/>
           <p:nvPr/>
         </p:nvSpPr>
         <p:spPr>
           <a:xfrm>
-            <a:off x="457200" y="3200400"/>
+            <a:off x="457200" y="2468880"/>
             <a:ext cx="11430000" cy="640080"/>
           </a:xfrm>
           <a:prstGeom prst="rect">
@@ -3301,7 +3266,42 @@
           <a:p>
             <a:pPr algn="ctr"/>
             <a:r>
-              <a:rPr sz="3400" b="1">
+              <a:rPr sz="3000" b="1">
+                <a:solidFill>
+                  <a:srgbClr val="000000"/>
+                </a:solidFill>
+                <a:latin typeface="Calibri"/>
+              </a:rPr>
+              <a:t>классификации фотографий по визуальному стилю</a:t>
+            </a:r>
+          </a:p>
+        </p:txBody>
+      </p:sp>
+      <p:sp>
+        <p:nvSpPr>
+          <p:cNvPr id="7" name="TextBox 6"/>
+          <p:cNvSpPr txBox="1"/>
+          <p:nvPr/>
+        </p:nvSpPr>
+        <p:spPr>
+          <a:xfrm>
+            <a:off x="457200" y="3017520"/>
+            <a:ext cx="11430000" cy="640080"/>
+          </a:xfrm>
+          <a:prstGeom prst="rect">
+            <a:avLst/>
+          </a:prstGeom>
+          <a:noFill/>
+        </p:spPr>
+        <p:txBody>
+          <a:bodyPr wrap="square" lIns="0" rIns="0" tIns="0" bIns="0">
+            <a:spAutoFit/>
+          </a:bodyPr>
+          <a:lstStyle/>
+          <a:p>
+            <a:pPr algn="ctr"/>
+            <a:r>
+              <a:rPr sz="3000" b="1">
                 <a:solidFill>
                   <a:srgbClr val="000000"/>
                 </a:solidFill>
